--- a/WebLegacyAI_Presentation.pptx
+++ b/WebLegacyAI_Presentation.pptx
@@ -310,7 +310,7 @@
           <a:p>
             <a:fld id="{5BCAD085-E8A6-8845-BD4E-CB4CCA059FC4}" type="datetimeFigureOut">
               <a:rPr lang="en-US" smtClean="0"/>
-              <a:t>5/28/2026</a:t>
+              <a:t>5/29/2026</a:t>
             </a:fld>
             <a:endParaRPr lang="en-US"/>
           </a:p>
@@ -478,7 +478,7 @@
           <a:p>
             <a:fld id="{5BCAD085-E8A6-8845-BD4E-CB4CCA059FC4}" type="datetimeFigureOut">
               <a:rPr lang="en-US" smtClean="0"/>
-              <a:t>5/28/2026</a:t>
+              <a:t>5/29/2026</a:t>
             </a:fld>
             <a:endParaRPr lang="en-US"/>
           </a:p>
@@ -656,7 +656,7 @@
           <a:p>
             <a:fld id="{5BCAD085-E8A6-8845-BD4E-CB4CCA059FC4}" type="datetimeFigureOut">
               <a:rPr lang="en-US" smtClean="0"/>
-              <a:t>5/28/2026</a:t>
+              <a:t>5/29/2026</a:t>
             </a:fld>
             <a:endParaRPr lang="en-US"/>
           </a:p>
@@ -824,7 +824,7 @@
           <a:p>
             <a:fld id="{5BCAD085-E8A6-8845-BD4E-CB4CCA059FC4}" type="datetimeFigureOut">
               <a:rPr lang="en-US" smtClean="0"/>
-              <a:t>5/28/2026</a:t>
+              <a:t>5/29/2026</a:t>
             </a:fld>
             <a:endParaRPr lang="en-US"/>
           </a:p>
@@ -1069,7 +1069,7 @@
           <a:p>
             <a:fld id="{5BCAD085-E8A6-8845-BD4E-CB4CCA059FC4}" type="datetimeFigureOut">
               <a:rPr lang="en-US" smtClean="0"/>
-              <a:t>5/28/2026</a:t>
+              <a:t>5/29/2026</a:t>
             </a:fld>
             <a:endParaRPr lang="en-US"/>
           </a:p>
@@ -1354,7 +1354,7 @@
           <a:p>
             <a:fld id="{5BCAD085-E8A6-8845-BD4E-CB4CCA059FC4}" type="datetimeFigureOut">
               <a:rPr lang="en-US" smtClean="0"/>
-              <a:t>5/28/2026</a:t>
+              <a:t>5/29/2026</a:t>
             </a:fld>
             <a:endParaRPr lang="en-US"/>
           </a:p>
@@ -1773,7 +1773,7 @@
           <a:p>
             <a:fld id="{5BCAD085-E8A6-8845-BD4E-CB4CCA059FC4}" type="datetimeFigureOut">
               <a:rPr lang="en-US" smtClean="0"/>
-              <a:t>5/28/2026</a:t>
+              <a:t>5/29/2026</a:t>
             </a:fld>
             <a:endParaRPr lang="en-US"/>
           </a:p>
@@ -1890,7 +1890,7 @@
           <a:p>
             <a:fld id="{5BCAD085-E8A6-8845-BD4E-CB4CCA059FC4}" type="datetimeFigureOut">
               <a:rPr lang="en-US" smtClean="0"/>
-              <a:t>5/28/2026</a:t>
+              <a:t>5/29/2026</a:t>
             </a:fld>
             <a:endParaRPr lang="en-US"/>
           </a:p>
@@ -1985,7 +1985,7 @@
           <a:p>
             <a:fld id="{5BCAD085-E8A6-8845-BD4E-CB4CCA059FC4}" type="datetimeFigureOut">
               <a:rPr lang="en-US" smtClean="0"/>
-              <a:t>5/28/2026</a:t>
+              <a:t>5/29/2026</a:t>
             </a:fld>
             <a:endParaRPr lang="en-US"/>
           </a:p>
@@ -2260,7 +2260,7 @@
           <a:p>
             <a:fld id="{5BCAD085-E8A6-8845-BD4E-CB4CCA059FC4}" type="datetimeFigureOut">
               <a:rPr lang="en-US" smtClean="0"/>
-              <a:t>5/28/2026</a:t>
+              <a:t>5/29/2026</a:t>
             </a:fld>
             <a:endParaRPr lang="en-US"/>
           </a:p>
@@ -2512,7 +2512,7 @@
           <a:p>
             <a:fld id="{5BCAD085-E8A6-8845-BD4E-CB4CCA059FC4}" type="datetimeFigureOut">
               <a:rPr lang="en-US" smtClean="0"/>
-              <a:t>5/28/2026</a:t>
+              <a:t>5/29/2026</a:t>
             </a:fld>
             <a:endParaRPr lang="en-US"/>
           </a:p>
@@ -2723,7 +2723,7 @@
           <a:p>
             <a:fld id="{5BCAD085-E8A6-8845-BD4E-CB4CCA059FC4}" type="datetimeFigureOut">
               <a:rPr lang="en-US" smtClean="0"/>
-              <a:t>5/28/2026</a:t>
+              <a:t>5/29/2026</a:t>
             </a:fld>
             <a:endParaRPr lang="en-US"/>
           </a:p>
@@ -3552,7 +3552,13 @@
       </p:sp>
       <p:pic>
         <p:nvPicPr>
-          <p:cNvPr id="3" name="Picture 2" descr="image.png"/>
+          <p:cNvPr id="6" name="Grafik 5">
+            <a:extLst>
+              <a:ext uri="{FF2B5EF4-FFF2-40B4-BE49-F238E27FC236}">
+                <a16:creationId xmlns:a16="http://schemas.microsoft.com/office/drawing/2014/main" id="{4E6D4F54-3E0D-A828-5FF5-3097D3244416}"/>
+              </a:ext>
+            </a:extLst>
+          </p:cNvPr>
           <p:cNvPicPr>
             <a:picLocks noChangeAspect="1"/>
           </p:cNvPicPr>
@@ -3566,58 +3572,14 @@
         </p:blipFill>
         <p:spPr>
           <a:xfrm>
-            <a:off x="2907781" y="1392238"/>
-            <a:ext cx="3328437" cy="4540754"/>
+            <a:off x="2136892" y="1417638"/>
+            <a:ext cx="4870215" cy="5165724"/>
           </a:xfrm>
           <a:prstGeom prst="rect">
             <a:avLst/>
           </a:prstGeom>
         </p:spPr>
       </p:pic>
-      <p:sp>
-        <p:nvSpPr>
-          <p:cNvPr id="4" name="TextBox 3"/>
-          <p:cNvSpPr txBox="1"/>
-          <p:nvPr/>
-        </p:nvSpPr>
-        <p:spPr>
-          <a:xfrm>
-            <a:off x="914400" y="5943600"/>
-            <a:ext cx="7090403" cy="646331"/>
-          </a:xfrm>
-          <a:prstGeom prst="rect">
-            <a:avLst/>
-          </a:prstGeom>
-          <a:noFill/>
-        </p:spPr>
-        <p:txBody>
-          <a:bodyPr wrap="none">
-            <a:spAutoFit/>
-          </a:bodyPr>
-          <a:lstStyle/>
-          <a:p>
-            <a:endParaRPr dirty="0"/>
-          </a:p>
-          <a:p>
-            <a:r>
-              <a:rPr dirty="0"/>
-              <a:t>1. Analysis (</a:t>
-            </a:r>
-            <a:r>
-              <a:rPr dirty="0" err="1"/>
-              <a:t>Python+Gemini</a:t>
-            </a:r>
-            <a:r>
-              <a:rPr dirty="0"/>
-              <a:t>) -&gt; 2. Mapping (EF Core) -&gt; 3. Generation (</a:t>
-            </a:r>
-            <a:r>
-              <a:t>C#)</a:t>
-            </a:r>
-            <a:endParaRPr dirty="0"/>
-          </a:p>
-        </p:txBody>
-      </p:sp>
     </p:spTree>
   </p:cSld>
   <p:clrMapOvr>
@@ -4261,13 +4223,12 @@
             </a:r>
             <a:r>
               <a:rPr dirty="0"/>
-              <a:t> C# API (Swagger).</a:t>
-            </a:r>
-          </a:p>
-          <a:p>
-            <a:pPr marL="0" indent="0">
-              <a:buNone/>
-            </a:pPr>
+              <a:t> C# API (Swagger)</a:t>
+            </a:r>
+            <a:r>
+              <a:rPr lang="de-DE" dirty="0"/>
+              <a:t>.</a:t>
+            </a:r>
             <a:endParaRPr dirty="0"/>
           </a:p>
         </p:txBody>
@@ -4328,9 +4289,16 @@
             <p:ph idx="1"/>
           </p:nvPr>
         </p:nvSpPr>
-        <p:spPr/>
-        <p:txBody>
-          <a:bodyPr/>
+        <p:spPr>
+          <a:xfrm>
+            <a:off x="457200" y="1600200"/>
+            <a:ext cx="8229600" cy="4922520"/>
+          </a:xfrm>
+        </p:spPr>
+        <p:txBody>
+          <a:bodyPr>
+            <a:normAutofit lnSpcReduction="10000"/>
+          </a:bodyPr>
           <a:lstStyle/>
           <a:p>
             <a:r>
@@ -4377,15 +4345,7 @@
             </a:r>
             <a:r>
               <a:rPr dirty="0"/>
-              <a:t> AI spart </a:t>
-            </a:r>
-            <a:r>
-              <a:rPr dirty="0" err="1"/>
-              <a:t>Wochen</a:t>
-            </a:r>
-            <a:r>
-              <a:rPr dirty="0"/>
-              <a:t> an </a:t>
+              <a:t> AI spart an </a:t>
             </a:r>
             <a:r>
               <a:rPr dirty="0" err="1"/>
@@ -4453,6 +4413,14 @@
               <a:rPr dirty="0"/>
               <a:t> Code.</a:t>
             </a:r>
+            <a:endParaRPr lang="de-DE" dirty="0"/>
+          </a:p>
+          <a:p>
+            <a:r>
+              <a:rPr lang="de-DE" dirty="0"/>
+              <a:t>Gemini API Key ist teuer in der Nutzung.</a:t>
+            </a:r>
+            <a:endParaRPr dirty="0"/>
           </a:p>
           <a:p>
             <a:endParaRPr dirty="0"/>
@@ -4487,16 +4455,10 @@
             </a:r>
           </a:p>
           <a:p>
+            <a:pPr marL="0" indent="0">
+              <a:buNone/>
+            </a:pPr>
             <a:endParaRPr dirty="0"/>
-          </a:p>
-          <a:p>
-            <a:pPr>
-              <a:defRPr sz="1400" i="1"/>
-            </a:pPr>
-            <a:r>
-              <a:rPr dirty="0"/>
-              <a:t>🎙️ Speaker: Aldin</a:t>
-            </a:r>
           </a:p>
         </p:txBody>
       </p:sp>
